--- a/fig/chapter3/中心建模框架.pptx
+++ b/fig/chapter3/中心建模框架.pptx
@@ -243,7 +243,7 @@
           <a:p>
             <a:fld id="{8FD31D0D-6B70-4EF7-93D2-39E0C25645C5}" type="datetimeFigureOut">
               <a:rPr lang="zh-CN" altLang="en-US" smtClean="0"/>
-              <a:t>2026/3/10</a:t>
+              <a:t>2026/3/19</a:t>
             </a:fld>
             <a:endParaRPr lang="zh-CN" altLang="en-US"/>
           </a:p>
@@ -413,7 +413,7 @@
           <a:p>
             <a:fld id="{8FD31D0D-6B70-4EF7-93D2-39E0C25645C5}" type="datetimeFigureOut">
               <a:rPr lang="zh-CN" altLang="en-US" smtClean="0"/>
-              <a:t>2026/3/10</a:t>
+              <a:t>2026/3/19</a:t>
             </a:fld>
             <a:endParaRPr lang="zh-CN" altLang="en-US"/>
           </a:p>
@@ -593,7 +593,7 @@
           <a:p>
             <a:fld id="{8FD31D0D-6B70-4EF7-93D2-39E0C25645C5}" type="datetimeFigureOut">
               <a:rPr lang="zh-CN" altLang="en-US" smtClean="0"/>
-              <a:t>2026/3/10</a:t>
+              <a:t>2026/3/19</a:t>
             </a:fld>
             <a:endParaRPr lang="zh-CN" altLang="en-US"/>
           </a:p>
@@ -763,7 +763,7 @@
           <a:p>
             <a:fld id="{8FD31D0D-6B70-4EF7-93D2-39E0C25645C5}" type="datetimeFigureOut">
               <a:rPr lang="zh-CN" altLang="en-US" smtClean="0"/>
-              <a:t>2026/3/10</a:t>
+              <a:t>2026/3/19</a:t>
             </a:fld>
             <a:endParaRPr lang="zh-CN" altLang="en-US"/>
           </a:p>
@@ -1007,7 +1007,7 @@
           <a:p>
             <a:fld id="{8FD31D0D-6B70-4EF7-93D2-39E0C25645C5}" type="datetimeFigureOut">
               <a:rPr lang="zh-CN" altLang="en-US" smtClean="0"/>
-              <a:t>2026/3/10</a:t>
+              <a:t>2026/3/19</a:t>
             </a:fld>
             <a:endParaRPr lang="zh-CN" altLang="en-US"/>
           </a:p>
@@ -1239,7 +1239,7 @@
           <a:p>
             <a:fld id="{8FD31D0D-6B70-4EF7-93D2-39E0C25645C5}" type="datetimeFigureOut">
               <a:rPr lang="zh-CN" altLang="en-US" smtClean="0"/>
-              <a:t>2026/3/10</a:t>
+              <a:t>2026/3/19</a:t>
             </a:fld>
             <a:endParaRPr lang="zh-CN" altLang="en-US"/>
           </a:p>
@@ -1606,7 +1606,7 @@
           <a:p>
             <a:fld id="{8FD31D0D-6B70-4EF7-93D2-39E0C25645C5}" type="datetimeFigureOut">
               <a:rPr lang="zh-CN" altLang="en-US" smtClean="0"/>
-              <a:t>2026/3/10</a:t>
+              <a:t>2026/3/19</a:t>
             </a:fld>
             <a:endParaRPr lang="zh-CN" altLang="en-US"/>
           </a:p>
@@ -1724,7 +1724,7 @@
           <a:p>
             <a:fld id="{8FD31D0D-6B70-4EF7-93D2-39E0C25645C5}" type="datetimeFigureOut">
               <a:rPr lang="zh-CN" altLang="en-US" smtClean="0"/>
-              <a:t>2026/3/10</a:t>
+              <a:t>2026/3/19</a:t>
             </a:fld>
             <a:endParaRPr lang="zh-CN" altLang="en-US"/>
           </a:p>
@@ -1819,7 +1819,7 @@
           <a:p>
             <a:fld id="{8FD31D0D-6B70-4EF7-93D2-39E0C25645C5}" type="datetimeFigureOut">
               <a:rPr lang="zh-CN" altLang="en-US" smtClean="0"/>
-              <a:t>2026/3/10</a:t>
+              <a:t>2026/3/19</a:t>
             </a:fld>
             <a:endParaRPr lang="zh-CN" altLang="en-US"/>
           </a:p>
@@ -2096,7 +2096,7 @@
           <a:p>
             <a:fld id="{8FD31D0D-6B70-4EF7-93D2-39E0C25645C5}" type="datetimeFigureOut">
               <a:rPr lang="zh-CN" altLang="en-US" smtClean="0"/>
-              <a:t>2026/3/10</a:t>
+              <a:t>2026/3/19</a:t>
             </a:fld>
             <a:endParaRPr lang="zh-CN" altLang="en-US"/>
           </a:p>
@@ -2353,7 +2353,7 @@
           <a:p>
             <a:fld id="{8FD31D0D-6B70-4EF7-93D2-39E0C25645C5}" type="datetimeFigureOut">
               <a:rPr lang="zh-CN" altLang="en-US" smtClean="0"/>
-              <a:t>2026/3/10</a:t>
+              <a:t>2026/3/19</a:t>
             </a:fld>
             <a:endParaRPr lang="zh-CN" altLang="en-US"/>
           </a:p>
@@ -2566,7 +2566,7 @@
           <a:p>
             <a:fld id="{8FD31D0D-6B70-4EF7-93D2-39E0C25645C5}" type="datetimeFigureOut">
               <a:rPr lang="zh-CN" altLang="en-US" smtClean="0"/>
-              <a:t>2026/3/10</a:t>
+              <a:t>2026/3/19</a:t>
             </a:fld>
             <a:endParaRPr lang="zh-CN" altLang="en-US"/>
           </a:p>
@@ -3127,8 +3127,8 @@
             </a:p>
           </p:txBody>
         </p:sp>
-        <mc:AlternateContent xmlns:mc="http://schemas.openxmlformats.org/markup-compatibility/2006" xmlns:a14="http://schemas.microsoft.com/office/drawing/2010/main">
-          <mc:Choice Requires="a14">
+        <mc:AlternateContent xmlns:mc="http://schemas.openxmlformats.org/markup-compatibility/2006">
+          <mc:Choice xmlns:a14="http://schemas.microsoft.com/office/drawing/2010/main" Requires="a14">
             <p:sp>
               <p:nvSpPr>
                 <p:cNvPr id="3" name="文本框 2">
@@ -3144,7 +3144,7 @@
               <p:spPr>
                 <a:xfrm>
                   <a:off x="2649663" y="1966197"/>
-                  <a:ext cx="775533" cy="249299"/>
+                  <a:ext cx="1221104" cy="369332"/>
                 </a:xfrm>
                 <a:prstGeom prst="rect">
                   <a:avLst/>
@@ -3158,7 +3158,10 @@
                 <a:lstStyle/>
                 <a:p>
                   <a:r>
-                    <a:rPr lang="zh-CN" altLang="en-US" dirty="0"/>
+                    <a:rPr lang="zh-CN" altLang="en-US" dirty="0">
+                      <a:latin typeface="宋体" panose="02010600030101010101" pitchFamily="2" charset="-122"/>
+                      <a:ea typeface="宋体" panose="02010600030101010101" pitchFamily="2" charset="-122"/>
+                    </a:rPr>
                     <a:t>特征中心</a:t>
                   </a:r>
                   <a14:m>
@@ -3171,12 +3174,15 @@
                       </m:r>
                     </m:oMath>
                   </a14:m>
-                  <a:endParaRPr lang="zh-CN" altLang="en-US" dirty="0"/>
+                  <a:endParaRPr lang="zh-CN" altLang="en-US" dirty="0">
+                    <a:latin typeface="宋体" panose="02010600030101010101" pitchFamily="2" charset="-122"/>
+                    <a:ea typeface="宋体" panose="02010600030101010101" pitchFamily="2" charset="-122"/>
+                  </a:endParaRPr>
                 </a:p>
               </p:txBody>
             </p:sp>
           </mc:Choice>
-          <mc:Fallback xmlns="">
+          <mc:Fallback>
             <p:sp>
               <p:nvSpPr>
                 <p:cNvPr id="3" name="文本框 2">
@@ -3194,7 +3200,7 @@
               <p:spPr>
                 <a:xfrm>
                   <a:off x="2649663" y="1966197"/>
-                  <a:ext cx="775533" cy="249299"/>
+                  <a:ext cx="1221104" cy="369332"/>
                 </a:xfrm>
                 <a:prstGeom prst="rect">
                   <a:avLst/>
@@ -3202,7 +3208,7 @@
                 <a:blipFill>
                   <a:blip r:embed="rId2"/>
                   <a:stretch>
-                    <a:fillRect l="-6299" t="-15000" r="-52756" b="-90000"/>
+                    <a:fillRect l="-4000" t="-13333" b="-23333"/>
                   </a:stretch>
                 </a:blipFill>
               </p:spPr>
